--- a/ppt/RAG08-LangChain-Embedding-TODO.pptx
+++ b/ppt/RAG08-LangChain-Embedding-TODO.pptx
@@ -5,15 +5,16 @@
     <p:sldMasterId id="2147483653" r:id="rId1"/>
   </p:sldMasterIdLst>
   <p:notesMasterIdLst>
-    <p:notesMasterId r:id="rId5"/>
+    <p:notesMasterId r:id="rId6"/>
   </p:notesMasterIdLst>
   <p:handoutMasterIdLst>
-    <p:handoutMasterId r:id="rId6"/>
+    <p:handoutMasterId r:id="rId7"/>
   </p:handoutMasterIdLst>
   <p:sldIdLst>
     <p:sldId id="264" r:id="rId2"/>
-    <p:sldId id="266" r:id="rId3"/>
-    <p:sldId id="267" r:id="rId4"/>
+    <p:sldId id="267" r:id="rId3"/>
+    <p:sldId id="282" r:id="rId4"/>
+    <p:sldId id="268" r:id="rId5"/>
   </p:sldIdLst>
   <p:sldSz cx="9144000" cy="6858000" type="screen4x3"/>
   <p:notesSz cx="6648450" cy="9782175"/>
@@ -3790,7 +3791,7 @@
           <p:cNvPr id="2" name="Titre 1">
             <a:extLst>
               <a:ext uri="{FF2B5EF4-FFF2-40B4-BE49-F238E27FC236}">
-                <a16:creationId xmlns:a16="http://schemas.microsoft.com/office/drawing/2014/main" id="{78AE7858-6156-07E3-FEA0-C4399620F21B}"/>
+                <a16:creationId xmlns:a16="http://schemas.microsoft.com/office/drawing/2014/main" id="{A7E6F117-33A5-241E-8854-814C80BC0A76}"/>
               </a:ext>
             </a:extLst>
           </p:cNvPr>
@@ -3815,7 +3816,7 @@
           <p:cNvPr id="3" name="Espace réservé du contenu 2">
             <a:extLst>
               <a:ext uri="{FF2B5EF4-FFF2-40B4-BE49-F238E27FC236}">
-                <a16:creationId xmlns:a16="http://schemas.microsoft.com/office/drawing/2014/main" id="{68FEF0D1-1A58-DDF2-8773-91AAC044EF52}"/>
+                <a16:creationId xmlns:a16="http://schemas.microsoft.com/office/drawing/2014/main" id="{B756EF03-696C-DC05-25A8-A1A7D6DD5F35}"/>
               </a:ext>
             </a:extLst>
           </p:cNvPr>
@@ -3833,82 +3834,53 @@
           <a:p>
             <a:r>
               <a:rPr lang="fr-FR" dirty="0"/>
-              <a:t>Historique 2022</a:t>
-            </a:r>
+              <a:t>Commencer par </a:t>
+            </a:r>
+            <a:r>
+              <a:rPr lang="fr-FR" dirty="0" err="1"/>
+              <a:t>textsplitter</a:t>
+            </a:r>
+            <a:endParaRPr lang="fr-FR" dirty="0"/>
+          </a:p>
+          <a:p>
+            <a:r>
+              <a:rPr lang="fr-FR" dirty="0">
+                <a:hlinkClick r:id="rId2"/>
+              </a:rPr>
+              <a:t>https://python.langchain.com/docs/concepts/text_splitters/</a:t>
+            </a:r>
+            <a:endParaRPr lang="fr-FR" dirty="0"/>
           </a:p>
           <a:p>
             <a:r>
               <a:rPr lang="fr-FR" dirty="0"/>
-              <a:t>Très complet</a:t>
-            </a:r>
+              <a:t>Puis les loaders</a:t>
+            </a:r>
+          </a:p>
+          <a:p>
+            <a:r>
+              <a:rPr lang="fr-FR" dirty="0">
+                <a:hlinkClick r:id="rId3"/>
+              </a:rPr>
+              <a:t>https://python.langchain.com/docs/integrations/document_loaders/</a:t>
+            </a:r>
+            <a:endParaRPr lang="fr-FR" dirty="0"/>
           </a:p>
           <a:p>
             <a:r>
               <a:rPr lang="fr-FR" dirty="0"/>
-              <a:t>Facile d'utilisation</a:t>
-            </a:r>
-          </a:p>
-          <a:p>
-            <a:r>
-              <a:rPr lang="fr-FR" dirty="0"/>
-              <a:t>Permet d'automatiser un workflow RAG</a:t>
-            </a:r>
-          </a:p>
-          <a:p>
-            <a:pPr lvl="1"/>
-            <a:r>
-              <a:rPr lang="fr-FR" dirty="0"/>
-              <a:t>Chainage</a:t>
-            </a:r>
-          </a:p>
-          <a:p>
-            <a:r>
-              <a:rPr lang="fr-FR" dirty="0"/>
-              <a:t>Compatible Cloud</a:t>
-            </a:r>
-          </a:p>
-          <a:p>
-            <a:r>
-              <a:rPr lang="fr-FR" dirty="0"/>
-              <a:t>Nécessite une clé en mode SaaS</a:t>
-            </a:r>
+              <a:t>Puis tuto1 RAG</a:t>
+            </a:r>
+          </a:p>
+          <a:p>
+            <a:endParaRPr lang="fr-FR" dirty="0"/>
           </a:p>
         </p:txBody>
       </p:sp>
-      <p:pic>
-        <p:nvPicPr>
-          <p:cNvPr id="4" name="Image 3">
-            <a:extLst>
-              <a:ext uri="{FF2B5EF4-FFF2-40B4-BE49-F238E27FC236}">
-                <a16:creationId xmlns:a16="http://schemas.microsoft.com/office/drawing/2014/main" id="{10DA405E-CD0C-8C36-7A7E-086440C7E1BB}"/>
-              </a:ext>
-            </a:extLst>
-          </p:cNvPr>
-          <p:cNvPicPr>
-            <a:picLocks noChangeAspect="1"/>
-          </p:cNvPicPr>
-          <p:nvPr/>
-        </p:nvPicPr>
-        <p:blipFill>
-          <a:blip r:embed="rId2"/>
-          <a:stretch>
-            <a:fillRect/>
-          </a:stretch>
-        </p:blipFill>
-        <p:spPr>
-          <a:xfrm>
-            <a:off x="2699792" y="277096"/>
-            <a:ext cx="4050357" cy="691936"/>
-          </a:xfrm>
-          <a:prstGeom prst="rect">
-            <a:avLst/>
-          </a:prstGeom>
-        </p:spPr>
-      </p:pic>
     </p:spTree>
     <p:extLst>
       <p:ext uri="{BB962C8B-B14F-4D97-AF65-F5344CB8AC3E}">
-        <p14:creationId xmlns:p14="http://schemas.microsoft.com/office/powerpoint/2010/main" val="1765380507"/>
+        <p14:creationId xmlns:p14="http://schemas.microsoft.com/office/powerpoint/2010/main" val="2347489300"/>
       </p:ext>
     </p:extLst>
   </p:cSld>
@@ -3940,7 +3912,7 @@
           <p:cNvPr id="2" name="Titre 1">
             <a:extLst>
               <a:ext uri="{FF2B5EF4-FFF2-40B4-BE49-F238E27FC236}">
-                <a16:creationId xmlns:a16="http://schemas.microsoft.com/office/drawing/2014/main" id="{A7E6F117-33A5-241E-8854-814C80BC0A76}"/>
+                <a16:creationId xmlns:a16="http://schemas.microsoft.com/office/drawing/2014/main" id="{C97E92FB-47BA-C38D-DF81-B119814D2173}"/>
               </a:ext>
             </a:extLst>
           </p:cNvPr>
@@ -3956,7 +3928,7 @@
           <a:bodyPr/>
           <a:lstStyle/>
           <a:p>
-            <a:endParaRPr lang="fr-FR" dirty="0"/>
+            <a:endParaRPr lang="fr-FR"/>
           </a:p>
         </p:txBody>
       </p:sp>
@@ -3965,7 +3937,7 @@
           <p:cNvPr id="3" name="Espace réservé du contenu 2">
             <a:extLst>
               <a:ext uri="{FF2B5EF4-FFF2-40B4-BE49-F238E27FC236}">
-                <a16:creationId xmlns:a16="http://schemas.microsoft.com/office/drawing/2014/main" id="{B756EF03-696C-DC05-25A8-A1A7D6DD5F35}"/>
+                <a16:creationId xmlns:a16="http://schemas.microsoft.com/office/drawing/2014/main" id="{8BEF8B5C-A34B-2CA2-16E0-54C4EB367B27}"/>
               </a:ext>
             </a:extLst>
           </p:cNvPr>
@@ -3983,15 +3955,7 @@
           <a:p>
             <a:r>
               <a:rPr lang="fr-FR" dirty="0"/>
-              <a:t>Commencer par le concept de surcouche de l'API des </a:t>
-            </a:r>
-            <a:r>
-              <a:rPr lang="fr-FR" dirty="0" err="1"/>
-              <a:t>LLMs</a:t>
-            </a:r>
-            <a:r>
-              <a:rPr lang="fr-FR"/>
-              <a:t> portable</a:t>
+              <a:t>https://python.langchain.com/docs/integrations/text_embedding/</a:t>
             </a:r>
           </a:p>
         </p:txBody>
@@ -3999,7 +3963,100 @@
     </p:spTree>
     <p:extLst>
       <p:ext uri="{BB962C8B-B14F-4D97-AF65-F5344CB8AC3E}">
-        <p14:creationId xmlns:p14="http://schemas.microsoft.com/office/powerpoint/2010/main" val="2347489300"/>
+        <p14:creationId xmlns:p14="http://schemas.microsoft.com/office/powerpoint/2010/main" val="3564234736"/>
+      </p:ext>
+    </p:extLst>
+  </p:cSld>
+  <p:clrMapOvr>
+    <a:masterClrMapping/>
+  </p:clrMapOvr>
+</p:sld>
+</file>
+
+<file path=ppt/slides/slide4.xml><?xml version="1.0" encoding="utf-8"?>
+<p:sld xmlns:a="http://schemas.openxmlformats.org/drawingml/2006/main" xmlns:r="http://schemas.openxmlformats.org/officeDocument/2006/relationships" xmlns:p="http://schemas.openxmlformats.org/presentationml/2006/main">
+  <p:cSld>
+    <p:spTree>
+      <p:nvGrpSpPr>
+        <p:cNvPr id="1" name=""/>
+        <p:cNvGrpSpPr/>
+        <p:nvPr/>
+      </p:nvGrpSpPr>
+      <p:grpSpPr>
+        <a:xfrm>
+          <a:off x="0" y="0"/>
+          <a:ext cx="0" cy="0"/>
+          <a:chOff x="0" y="0"/>
+          <a:chExt cx="0" cy="0"/>
+        </a:xfrm>
+      </p:grpSpPr>
+      <p:sp>
+        <p:nvSpPr>
+          <p:cNvPr id="2" name="Titre 1">
+            <a:extLst>
+              <a:ext uri="{FF2B5EF4-FFF2-40B4-BE49-F238E27FC236}">
+                <a16:creationId xmlns:a16="http://schemas.microsoft.com/office/drawing/2014/main" id="{3980C3B9-4C27-3A96-3234-43F6E5A758F9}"/>
+              </a:ext>
+            </a:extLst>
+          </p:cNvPr>
+          <p:cNvSpPr>
+            <a:spLocks noGrp="1"/>
+          </p:cNvSpPr>
+          <p:nvPr>
+            <p:ph type="title"/>
+          </p:nvPr>
+        </p:nvSpPr>
+        <p:spPr/>
+        <p:txBody>
+          <a:bodyPr/>
+          <a:lstStyle/>
+          <a:p>
+            <a:r>
+              <a:rPr lang="fr-FR" dirty="0" err="1"/>
+              <a:t>retrieval</a:t>
+            </a:r>
+            <a:endParaRPr lang="fr-FR" dirty="0"/>
+          </a:p>
+        </p:txBody>
+      </p:sp>
+      <p:sp>
+        <p:nvSpPr>
+          <p:cNvPr id="3" name="Espace réservé du contenu 2">
+            <a:extLst>
+              <a:ext uri="{FF2B5EF4-FFF2-40B4-BE49-F238E27FC236}">
+                <a16:creationId xmlns:a16="http://schemas.microsoft.com/office/drawing/2014/main" id="{A1F4CDF4-1DC4-F775-E114-29638C7E6E2E}"/>
+              </a:ext>
+            </a:extLst>
+          </p:cNvPr>
+          <p:cNvSpPr>
+            <a:spLocks noGrp="1"/>
+          </p:cNvSpPr>
+          <p:nvPr>
+            <p:ph idx="1"/>
+          </p:nvPr>
+        </p:nvSpPr>
+        <p:spPr/>
+        <p:txBody>
+          <a:bodyPr/>
+          <a:lstStyle/>
+          <a:p>
+            <a:r>
+              <a:rPr lang="fr-FR">
+                <a:hlinkClick r:id="rId2"/>
+              </a:rPr>
+              <a:t>https://python.langchain.com/docs/integrations/retrievers/</a:t>
+            </a:r>
+            <a:endParaRPr lang="fr-FR"/>
+          </a:p>
+          <a:p>
+            <a:endParaRPr lang="fr-FR"/>
+          </a:p>
+        </p:txBody>
+      </p:sp>
+    </p:spTree>
+    <p:extLst>
+      <p:ext uri="{BB962C8B-B14F-4D97-AF65-F5344CB8AC3E}">
+        <p14:creationId xmlns:p14="http://schemas.microsoft.com/office/powerpoint/2010/main" val="798096659"/>
       </p:ext>
     </p:extLst>
   </p:cSld>

--- a/ppt/RAG08-LangChain-Embedding-TODO.pptx
+++ b/ppt/RAG08-LangChain-Embedding-TODO.pptx
@@ -5,16 +5,17 @@
     <p:sldMasterId id="2147483653" r:id="rId1"/>
   </p:sldMasterIdLst>
   <p:notesMasterIdLst>
-    <p:notesMasterId r:id="rId6"/>
+    <p:notesMasterId r:id="rId7"/>
   </p:notesMasterIdLst>
   <p:handoutMasterIdLst>
-    <p:handoutMasterId r:id="rId7"/>
+    <p:handoutMasterId r:id="rId8"/>
   </p:handoutMasterIdLst>
   <p:sldIdLst>
     <p:sldId id="264" r:id="rId2"/>
     <p:sldId id="267" r:id="rId3"/>
     <p:sldId id="282" r:id="rId4"/>
     <p:sldId id="268" r:id="rId5"/>
+    <p:sldId id="283" r:id="rId6"/>
   </p:sldIdLst>
   <p:sldSz cx="9144000" cy="6858000" type="screen4x3"/>
   <p:notesSz cx="6648450" cy="9782175"/>
@@ -4057,6 +4058,101 @@
     <p:extLst>
       <p:ext uri="{BB962C8B-B14F-4D97-AF65-F5344CB8AC3E}">
         <p14:creationId xmlns:p14="http://schemas.microsoft.com/office/powerpoint/2010/main" val="798096659"/>
+      </p:ext>
+    </p:extLst>
+  </p:cSld>
+  <p:clrMapOvr>
+    <a:masterClrMapping/>
+  </p:clrMapOvr>
+</p:sld>
+</file>
+
+<file path=ppt/slides/slide5.xml><?xml version="1.0" encoding="utf-8"?>
+<p:sld xmlns:a="http://schemas.openxmlformats.org/drawingml/2006/main" xmlns:r="http://schemas.openxmlformats.org/officeDocument/2006/relationships" xmlns:p="http://schemas.openxmlformats.org/presentationml/2006/main">
+  <p:cSld>
+    <p:spTree>
+      <p:nvGrpSpPr>
+        <p:cNvPr id="1" name=""/>
+        <p:cNvGrpSpPr/>
+        <p:nvPr/>
+      </p:nvGrpSpPr>
+      <p:grpSpPr>
+        <a:xfrm>
+          <a:off x="0" y="0"/>
+          <a:ext cx="0" cy="0"/>
+          <a:chOff x="0" y="0"/>
+          <a:chExt cx="0" cy="0"/>
+        </a:xfrm>
+      </p:grpSpPr>
+      <p:sp>
+        <p:nvSpPr>
+          <p:cNvPr id="2" name="Titre 1">
+            <a:extLst>
+              <a:ext uri="{FF2B5EF4-FFF2-40B4-BE49-F238E27FC236}">
+                <a16:creationId xmlns:a16="http://schemas.microsoft.com/office/drawing/2014/main" id="{FC43EA71-D982-49A8-4DCD-F43B1129FC73}"/>
+              </a:ext>
+            </a:extLst>
+          </p:cNvPr>
+          <p:cNvSpPr>
+            <a:spLocks noGrp="1"/>
+          </p:cNvSpPr>
+          <p:nvPr>
+            <p:ph type="title"/>
+          </p:nvPr>
+        </p:nvSpPr>
+        <p:spPr/>
+        <p:txBody>
+          <a:bodyPr/>
+          <a:lstStyle/>
+          <a:p>
+            <a:endParaRPr lang="fr-FR"/>
+          </a:p>
+        </p:txBody>
+      </p:sp>
+      <p:sp>
+        <p:nvSpPr>
+          <p:cNvPr id="3" name="Espace réservé du contenu 2">
+            <a:extLst>
+              <a:ext uri="{FF2B5EF4-FFF2-40B4-BE49-F238E27FC236}">
+                <a16:creationId xmlns:a16="http://schemas.microsoft.com/office/drawing/2014/main" id="{A4E24007-0DE2-5FF4-C36F-00F250C3FAAB}"/>
+              </a:ext>
+            </a:extLst>
+          </p:cNvPr>
+          <p:cNvSpPr>
+            <a:spLocks noGrp="1"/>
+          </p:cNvSpPr>
+          <p:nvPr>
+            <p:ph idx="1"/>
+          </p:nvPr>
+        </p:nvSpPr>
+        <p:spPr/>
+        <p:txBody>
+          <a:bodyPr/>
+          <a:lstStyle/>
+          <a:p>
+            <a:r>
+              <a:rPr lang="fr-FR" dirty="0"/>
+              <a:t>Chainage</a:t>
+            </a:r>
+          </a:p>
+          <a:p>
+            <a:r>
+              <a:rPr lang="fr-FR" dirty="0"/>
+              <a:t>QA</a:t>
+            </a:r>
+          </a:p>
+          <a:p>
+            <a:r>
+              <a:rPr lang="fr-FR"/>
+              <a:t>Graph</a:t>
+            </a:r>
+          </a:p>
+        </p:txBody>
+      </p:sp>
+    </p:spTree>
+    <p:extLst>
+      <p:ext uri="{BB962C8B-B14F-4D97-AF65-F5344CB8AC3E}">
+        <p14:creationId xmlns:p14="http://schemas.microsoft.com/office/powerpoint/2010/main" val="3441646262"/>
       </p:ext>
     </p:extLst>
   </p:cSld>
